--- a/skill-forks/thesis-defense-ja/example/skeleton.pptx
+++ b/skill-forks/thesis-defense-ja/example/skeleton.pptx
@@ -307,7 +307,7 @@
           <a:p>
             <a:fld id="{5BCAD085-E8A6-8845-BD4E-CB4CCA059FC4}" type="datetimeFigureOut">
               <a:rPr lang="en-US" smtClean="0"/>
-              <a:t>10/14/2026</a:t>
+              <a:t>10/16/2026</a:t>
             </a:fld>
             <a:endParaRPr lang="en-US"/>
           </a:p>
@@ -475,7 +475,7 @@
           <a:p>
             <a:fld id="{5BCAD085-E8A6-8845-BD4E-CB4CCA059FC4}" type="datetimeFigureOut">
               <a:rPr lang="en-US" smtClean="0"/>
-              <a:t>10/14/2026</a:t>
+              <a:t>10/16/2026</a:t>
             </a:fld>
             <a:endParaRPr lang="en-US"/>
           </a:p>
@@ -653,7 +653,7 @@
           <a:p>
             <a:fld id="{5BCAD085-E8A6-8845-BD4E-CB4CCA059FC4}" type="datetimeFigureOut">
               <a:rPr lang="en-US" smtClean="0"/>
-              <a:t>10/14/2026</a:t>
+              <a:t>10/16/2026</a:t>
             </a:fld>
             <a:endParaRPr lang="en-US"/>
           </a:p>
@@ -821,7 +821,7 @@
           <a:p>
             <a:fld id="{5BCAD085-E8A6-8845-BD4E-CB4CCA059FC4}" type="datetimeFigureOut">
               <a:rPr lang="en-US" smtClean="0"/>
-              <a:t>10/14/2026</a:t>
+              <a:t>10/16/2026</a:t>
             </a:fld>
             <a:endParaRPr lang="en-US"/>
           </a:p>
@@ -1066,7 +1066,7 @@
           <a:p>
             <a:fld id="{5BCAD085-E8A6-8845-BD4E-CB4CCA059FC4}" type="datetimeFigureOut">
               <a:rPr lang="en-US" smtClean="0"/>
-              <a:t>10/14/2026</a:t>
+              <a:t>10/16/2026</a:t>
             </a:fld>
             <a:endParaRPr lang="en-US"/>
           </a:p>
@@ -1351,7 +1351,7 @@
           <a:p>
             <a:fld id="{5BCAD085-E8A6-8845-BD4E-CB4CCA059FC4}" type="datetimeFigureOut">
               <a:rPr lang="en-US" smtClean="0"/>
-              <a:t>10/14/2026</a:t>
+              <a:t>10/16/2026</a:t>
             </a:fld>
             <a:endParaRPr lang="en-US"/>
           </a:p>
@@ -1770,7 +1770,7 @@
           <a:p>
             <a:fld id="{5BCAD085-E8A6-8845-BD4E-CB4CCA059FC4}" type="datetimeFigureOut">
               <a:rPr lang="en-US" smtClean="0"/>
-              <a:t>10/14/2026</a:t>
+              <a:t>10/16/2026</a:t>
             </a:fld>
             <a:endParaRPr lang="en-US"/>
           </a:p>
@@ -1887,7 +1887,7 @@
           <a:p>
             <a:fld id="{5BCAD085-E8A6-8845-BD4E-CB4CCA059FC4}" type="datetimeFigureOut">
               <a:rPr lang="en-US" smtClean="0"/>
-              <a:t>10/14/2026</a:t>
+              <a:t>10/16/2026</a:t>
             </a:fld>
             <a:endParaRPr lang="en-US"/>
           </a:p>
@@ -1982,7 +1982,7 @@
           <a:p>
             <a:fld id="{5BCAD085-E8A6-8845-BD4E-CB4CCA059FC4}" type="datetimeFigureOut">
               <a:rPr lang="en-US" smtClean="0"/>
-              <a:t>10/14/2026</a:t>
+              <a:t>10/16/2026</a:t>
             </a:fld>
             <a:endParaRPr lang="en-US"/>
           </a:p>
@@ -2257,7 +2257,7 @@
           <a:p>
             <a:fld id="{5BCAD085-E8A6-8845-BD4E-CB4CCA059FC4}" type="datetimeFigureOut">
               <a:rPr lang="en-US" smtClean="0"/>
-              <a:t>10/14/2026</a:t>
+              <a:t>10/16/2026</a:t>
             </a:fld>
             <a:endParaRPr lang="en-US"/>
           </a:p>
@@ -2509,7 +2509,7 @@
           <a:p>
             <a:fld id="{5BCAD085-E8A6-8845-BD4E-CB4CCA059FC4}" type="datetimeFigureOut">
               <a:rPr lang="en-US" smtClean="0"/>
-              <a:t>10/14/2026</a:t>
+              <a:t>10/16/2026</a:t>
             </a:fld>
             <a:endParaRPr lang="en-US"/>
           </a:p>
@@ -2720,7 +2720,7 @@
           <a:p>
             <a:fld id="{5BCAD085-E8A6-8845-BD4E-CB4CCA059FC4}" type="datetimeFigureOut">
               <a:rPr lang="en-US" smtClean="0"/>
-              <a:t>10/14/2026</a:t>
+              <a:t>10/16/2026</a:t>
             </a:fld>
             <a:endParaRPr lang="en-US"/>
           </a:p>
@@ -3284,7 +3284,7 @@
     </p:spTree>
     <p:extLst>
       <p:ext uri="{BB962C8B-B14F-4D97-AF65-F5344CB8AC3E}">
-        <p14:creationId xmlns:p14="http://schemas.microsoft.com/office/powerpoint/2010/main" val="2524477207"/>
+        <p14:creationId xmlns:p14="http://schemas.microsoft.com/office/powerpoint/2010/main" val="128001777"/>
       </p:ext>
     </p:extLst>
   </p:cSld>
@@ -3835,7 +3835,7 @@
     </p:spTree>
     <p:extLst>
       <p:ext uri="{BB962C8B-B14F-4D97-AF65-F5344CB8AC3E}">
-        <p14:creationId xmlns:p14="http://schemas.microsoft.com/office/powerpoint/2010/main" val="1249033750"/>
+        <p14:creationId xmlns:p14="http://schemas.microsoft.com/office/powerpoint/2010/main" val="3945492982"/>
       </p:ext>
     </p:extLst>
   </p:cSld>
@@ -4386,7 +4386,7 @@
     </p:spTree>
     <p:extLst>
       <p:ext uri="{BB962C8B-B14F-4D97-AF65-F5344CB8AC3E}">
-        <p14:creationId xmlns:p14="http://schemas.microsoft.com/office/powerpoint/2010/main" val="3582070808"/>
+        <p14:creationId xmlns:p14="http://schemas.microsoft.com/office/powerpoint/2010/main" val="2817996173"/>
       </p:ext>
     </p:extLst>
   </p:cSld>
@@ -4937,7 +4937,7 @@
     </p:spTree>
     <p:extLst>
       <p:ext uri="{BB962C8B-B14F-4D97-AF65-F5344CB8AC3E}">
-        <p14:creationId xmlns:p14="http://schemas.microsoft.com/office/powerpoint/2010/main" val="2775875775"/>
+        <p14:creationId xmlns:p14="http://schemas.microsoft.com/office/powerpoint/2010/main" val="437853709"/>
       </p:ext>
     </p:extLst>
   </p:cSld>
@@ -5488,7 +5488,7 @@
     </p:spTree>
     <p:extLst>
       <p:ext uri="{BB962C8B-B14F-4D97-AF65-F5344CB8AC3E}">
-        <p14:creationId xmlns:p14="http://schemas.microsoft.com/office/powerpoint/2010/main" val="2283905930"/>
+        <p14:creationId xmlns:p14="http://schemas.microsoft.com/office/powerpoint/2010/main" val="2101470553"/>
       </p:ext>
     </p:extLst>
   </p:cSld>
@@ -6039,7 +6039,7 @@
     </p:spTree>
     <p:extLst>
       <p:ext uri="{BB962C8B-B14F-4D97-AF65-F5344CB8AC3E}">
-        <p14:creationId xmlns:p14="http://schemas.microsoft.com/office/powerpoint/2010/main" val="514539770"/>
+        <p14:creationId xmlns:p14="http://schemas.microsoft.com/office/powerpoint/2010/main" val="1152057348"/>
       </p:ext>
     </p:extLst>
   </p:cSld>
